--- a/M4/GDV_2D_Gym/les1/2D_Gym_les1.pptx
+++ b/M4/GDV_2D_Gym/les1/2D_Gym_les1.pptx
@@ -271,7 +271,7 @@
           <a:p>
             <a:fld id="{7F6255D4-ABB5-456D-9970-B21DD0297007}" type="datetimeFigureOut">
               <a:rPr lang="en-US" smtClean="0"/>
-              <a:t>5/6/2026</a:t>
+              <a:t>06-May-26</a:t>
             </a:fld>
             <a:endParaRPr lang="en-US"/>
           </a:p>
@@ -471,7 +471,7 @@
           <a:p>
             <a:fld id="{7F6255D4-ABB5-456D-9970-B21DD0297007}" type="datetimeFigureOut">
               <a:rPr lang="en-US" smtClean="0"/>
-              <a:t>5/6/2026</a:t>
+              <a:t>06-May-26</a:t>
             </a:fld>
             <a:endParaRPr lang="en-US"/>
           </a:p>
@@ -681,7 +681,7 @@
           <a:p>
             <a:fld id="{7F6255D4-ABB5-456D-9970-B21DD0297007}" type="datetimeFigureOut">
               <a:rPr lang="en-US" smtClean="0"/>
-              <a:t>5/6/2026</a:t>
+              <a:t>06-May-26</a:t>
             </a:fld>
             <a:endParaRPr lang="en-US"/>
           </a:p>
@@ -881,7 +881,7 @@
           <a:p>
             <a:fld id="{7F6255D4-ABB5-456D-9970-B21DD0297007}" type="datetimeFigureOut">
               <a:rPr lang="en-US" smtClean="0"/>
-              <a:t>5/6/2026</a:t>
+              <a:t>06-May-26</a:t>
             </a:fld>
             <a:endParaRPr lang="en-US"/>
           </a:p>
@@ -1157,7 +1157,7 @@
           <a:p>
             <a:fld id="{7F6255D4-ABB5-456D-9970-B21DD0297007}" type="datetimeFigureOut">
               <a:rPr lang="en-US" smtClean="0"/>
-              <a:t>5/6/2026</a:t>
+              <a:t>06-May-26</a:t>
             </a:fld>
             <a:endParaRPr lang="en-US"/>
           </a:p>
@@ -1425,7 +1425,7 @@
           <a:p>
             <a:fld id="{7F6255D4-ABB5-456D-9970-B21DD0297007}" type="datetimeFigureOut">
               <a:rPr lang="en-US" smtClean="0"/>
-              <a:t>5/6/2026</a:t>
+              <a:t>06-May-26</a:t>
             </a:fld>
             <a:endParaRPr lang="en-US"/>
           </a:p>
@@ -1840,7 +1840,7 @@
           <a:p>
             <a:fld id="{7F6255D4-ABB5-456D-9970-B21DD0297007}" type="datetimeFigureOut">
               <a:rPr lang="en-US" smtClean="0"/>
-              <a:t>5/6/2026</a:t>
+              <a:t>06-May-26</a:t>
             </a:fld>
             <a:endParaRPr lang="en-US"/>
           </a:p>
@@ -1982,7 +1982,7 @@
           <a:p>
             <a:fld id="{7F6255D4-ABB5-456D-9970-B21DD0297007}" type="datetimeFigureOut">
               <a:rPr lang="en-US" smtClean="0"/>
-              <a:t>5/6/2026</a:t>
+              <a:t>06-May-26</a:t>
             </a:fld>
             <a:endParaRPr lang="en-US"/>
           </a:p>
@@ -2095,7 +2095,7 @@
           <a:p>
             <a:fld id="{7F6255D4-ABB5-456D-9970-B21DD0297007}" type="datetimeFigureOut">
               <a:rPr lang="en-US" smtClean="0"/>
-              <a:t>5/6/2026</a:t>
+              <a:t>06-May-26</a:t>
             </a:fld>
             <a:endParaRPr lang="en-US"/>
           </a:p>
@@ -2408,7 +2408,7 @@
           <a:p>
             <a:fld id="{7F6255D4-ABB5-456D-9970-B21DD0297007}" type="datetimeFigureOut">
               <a:rPr lang="en-US" smtClean="0"/>
-              <a:t>5/6/2026</a:t>
+              <a:t>06-May-26</a:t>
             </a:fld>
             <a:endParaRPr lang="en-US"/>
           </a:p>
@@ -2697,7 +2697,7 @@
           <a:p>
             <a:fld id="{7F6255D4-ABB5-456D-9970-B21DD0297007}" type="datetimeFigureOut">
               <a:rPr lang="en-US" smtClean="0"/>
-              <a:t>5/6/2026</a:t>
+              <a:t>06-May-26</a:t>
             </a:fld>
             <a:endParaRPr lang="en-US"/>
           </a:p>
@@ -2940,7 +2940,7 @@
           <a:p>
             <a:fld id="{7F6255D4-ABB5-456D-9970-B21DD0297007}" type="datetimeFigureOut">
               <a:rPr lang="en-US" smtClean="0"/>
-              <a:t>5/6/2026</a:t>
+              <a:t>06-May-26</a:t>
             </a:fld>
             <a:endParaRPr lang="en-US"/>
           </a:p>
@@ -7435,7 +7435,7 @@
         </p:nvSpPr>
         <p:spPr>
           <a:xfrm>
-            <a:off x="1064941" y="4968531"/>
+            <a:off x="9456136" y="4664169"/>
             <a:ext cx="710451" cy="369332"/>
           </a:xfrm>
           <a:prstGeom prst="rect">
@@ -8508,12 +8508,11 @@
 </file>
 
 <file path=customXml/item1.xml><?xml version="1.0" encoding="utf-8"?>
-<?mso-contentType ?>
-<FormTemplates xmlns="http://schemas.microsoft.com/sharepoint/v3/contenttype/forms">
-  <Display>DocumentLibraryForm</Display>
-  <Edit>DocumentLibraryForm</Edit>
-  <New>DocumentLibraryForm</New>
-</FormTemplates>
+<p:properties xmlns:p="http://schemas.microsoft.com/office/2006/metadata/properties" xmlns:xsi="http://www.w3.org/2001/XMLSchema-instance" xmlns:pc="http://schemas.microsoft.com/office/infopath/2007/PartnerControls">
+  <documentManagement>
+    <_activity xmlns="0ea95f8c-d148-44ae-916f-e4fae07bb092" xsi:nil="true"/>
+  </documentManagement>
+</p:properties>
 </file>
 
 <file path=customXml/item2.xml><?xml version="1.0" encoding="utf-8"?>
@@ -8770,17 +8769,27 @@
 </file>
 
 <file path=customXml/item3.xml><?xml version="1.0" encoding="utf-8"?>
-<p:properties xmlns:p="http://schemas.microsoft.com/office/2006/metadata/properties" xmlns:xsi="http://www.w3.org/2001/XMLSchema-instance" xmlns:pc="http://schemas.microsoft.com/office/infopath/2007/PartnerControls">
-  <documentManagement>
-    <_activity xmlns="0ea95f8c-d148-44ae-916f-e4fae07bb092" xsi:nil="true"/>
-  </documentManagement>
-</p:properties>
+<?mso-contentType ?>
+<FormTemplates xmlns="http://schemas.microsoft.com/sharepoint/v3/contenttype/forms">
+  <Display>DocumentLibraryForm</Display>
+  <Edit>DocumentLibraryForm</Edit>
+  <New>DocumentLibraryForm</New>
+</FormTemplates>
 </file>
 
 <file path=customXml/itemProps1.xml><?xml version="1.0" encoding="utf-8"?>
-<ds:datastoreItem xmlns:ds="http://schemas.openxmlformats.org/officeDocument/2006/customXml" ds:itemID="{FE951165-B379-4FBD-9FD8-D14F0F4D64C9}">
+<ds:datastoreItem xmlns:ds="http://schemas.openxmlformats.org/officeDocument/2006/customXml" ds:itemID="{4AE02E84-4242-4C95-906B-10487FB4E1EE}">
   <ds:schemaRefs>
-    <ds:schemaRef ds:uri="http://schemas.microsoft.com/sharepoint/v3/contenttype/forms"/>
+    <ds:schemaRef ds:uri="http://purl.org/dc/elements/1.1/"/>
+    <ds:schemaRef ds:uri="http://purl.org/dc/dcmitype/"/>
+    <ds:schemaRef ds:uri="http://schemas.microsoft.com/office/2006/metadata/properties"/>
+    <ds:schemaRef ds:uri="http://schemas.microsoft.com/office/2006/documentManagement/types"/>
+    <ds:schemaRef ds:uri="07db6276-f26f-4be5-81e0-f9ee6746fca8"/>
+    <ds:schemaRef ds:uri="http://schemas.microsoft.com/office/infopath/2007/PartnerControls"/>
+    <ds:schemaRef ds:uri="http://schemas.openxmlformats.org/package/2006/metadata/core-properties"/>
+    <ds:schemaRef ds:uri="0ea95f8c-d148-44ae-916f-e4fae07bb092"/>
+    <ds:schemaRef ds:uri="http://www.w3.org/XML/1998/namespace"/>
+    <ds:schemaRef ds:uri="http://purl.org/dc/terms/"/>
   </ds:schemaRefs>
 </ds:datastoreItem>
 </file>
@@ -8805,18 +8814,9 @@
 </file>
 
 <file path=customXml/itemProps3.xml><?xml version="1.0" encoding="utf-8"?>
-<ds:datastoreItem xmlns:ds="http://schemas.openxmlformats.org/officeDocument/2006/customXml" ds:itemID="{4AE02E84-4242-4C95-906B-10487FB4E1EE}">
+<ds:datastoreItem xmlns:ds="http://schemas.openxmlformats.org/officeDocument/2006/customXml" ds:itemID="{FE951165-B379-4FBD-9FD8-D14F0F4D64C9}">
   <ds:schemaRefs>
-    <ds:schemaRef ds:uri="http://purl.org/dc/elements/1.1/"/>
-    <ds:schemaRef ds:uri="http://purl.org/dc/dcmitype/"/>
-    <ds:schemaRef ds:uri="http://schemas.microsoft.com/office/2006/metadata/properties"/>
-    <ds:schemaRef ds:uri="http://schemas.microsoft.com/office/2006/documentManagement/types"/>
-    <ds:schemaRef ds:uri="07db6276-f26f-4be5-81e0-f9ee6746fca8"/>
-    <ds:schemaRef ds:uri="http://schemas.microsoft.com/office/infopath/2007/PartnerControls"/>
-    <ds:schemaRef ds:uri="http://schemas.openxmlformats.org/package/2006/metadata/core-properties"/>
-    <ds:schemaRef ds:uri="0ea95f8c-d148-44ae-916f-e4fae07bb092"/>
-    <ds:schemaRef ds:uri="http://www.w3.org/XML/1998/namespace"/>
-    <ds:schemaRef ds:uri="http://purl.org/dc/terms/"/>
+    <ds:schemaRef ds:uri="http://schemas.microsoft.com/sharepoint/v3/contenttype/forms"/>
   </ds:schemaRefs>
 </ds:datastoreItem>
 </file>